--- a/classes/parte-2-criptografia-aplicada/064-esteganografia-y-ocultacion-de-datos/clase-064-presentacion.pptx
+++ b/classes/parte-2-criptografia-aplicada/064-esteganografia-y-ocultacion-de-datos/clase-064-presentacion.pptx
@@ -17,6 +17,9 @@
     <p:sldId id="265" r:id="rId16"/>
     <p:sldId id="266" r:id="rId17"/>
     <p:sldId id="267" r:id="rId18"/>
+    <p:sldId id="268" r:id="rId19"/>
+    <p:sldId id="269" r:id="rId20"/>
+    <p:sldId id="270" r:id="rId21"/>
   </p:sldIdLst>
   <p:sldSz cx="9144000" cy="6858000" type="screen4x3"/>
   <p:notesSz cx="6858000" cy="9144000"/>
@@ -3198,7 +3201,7 @@
                   <a:srgbClr val="0B3D2E"/>
                 </a:solidFill>
               </a:rPr>
-              <a:t>⚠️ Errores comunes</a:t>
+              <a:t>✍️ Ejercicios</a:t>
             </a:r>
           </a:p>
         </p:txBody>
@@ -3236,67 +3239,82 @@
                   <a:srgbClr val="22282E"/>
                 </a:solidFill>
               </a:rPr>
-              <a:t>•  El mensaje oculto se pierde — Recompresión JPEG destruye LSB; usa formatos sin pérdida (PNG)</a:t>
-            </a:r>
-          </a:p>
-          <a:p>
-            <a:pPr>
-              <a:spcAft>
-                <a:spcPts val="600"/>
-              </a:spcAft>
-            </a:pPr>
-            <a:r>
-              <a:rPr sz="1500">
-                <a:solidFill>
-                  <a:srgbClr val="22282E"/>
-                </a:solidFill>
-              </a:rPr>
-              <a:t>•  Confiar solo en la ocultación — Si se detecta, se lee; cifra antes de ocultar</a:t>
-            </a:r>
-          </a:p>
-          <a:p>
-            <a:pPr>
-              <a:spcAft>
-                <a:spcPts val="600"/>
-              </a:spcAft>
-            </a:pPr>
-            <a:r>
-              <a:rPr sz="1500">
-                <a:solidFill>
-                  <a:srgbClr val="22282E"/>
-                </a:solidFill>
-              </a:rPr>
-              <a:t>•  Portador visiblemente alterado — Demasiada carga; reduce la capacidad</a:t>
-            </a:r>
-          </a:p>
-          <a:p>
-            <a:pPr>
-              <a:spcAft>
-                <a:spcPts val="600"/>
-              </a:spcAft>
-            </a:pPr>
-            <a:r>
-              <a:rPr sz="1500">
-                <a:solidFill>
-                  <a:srgbClr val="22282E"/>
-                </a:solidFill>
-              </a:rPr>
-              <a:t>•  Estego detectable trivialmente — Patrón LSB uniforme; distribuye o usa técnicas robustas</a:t>
-            </a:r>
-          </a:p>
-          <a:p>
-            <a:pPr>
-              <a:spcAft>
-                <a:spcPts val="600"/>
-              </a:spcAft>
-            </a:pPr>
-            <a:r>
-              <a:rPr sz="1500">
-                <a:solidFill>
-                  <a:srgbClr val="22282E"/>
-                </a:solidFill>
-              </a:rPr>
-              <a:t>•  Usar estego para evadir controles sin permiso — Ilegal; limítate a laboratorio propio</a:t>
+              <a:t>•  Explica la diferencia entre esteganografía y cifrado con un ejemplo.</a:t>
+            </a:r>
+          </a:p>
+          <a:p>
+            <a:pPr>
+              <a:spcAft>
+                <a:spcPts val="600"/>
+              </a:spcAft>
+            </a:pPr>
+            <a:r>
+              <a:rPr sz="1500">
+                <a:solidFill>
+                  <a:srgbClr val="22282E"/>
+                </a:solidFill>
+              </a:rPr>
+              <a:t>•  Oculta y recupera un mensaje LSB en una imagen propia.</a:t>
+            </a:r>
+          </a:p>
+          <a:p>
+            <a:pPr>
+              <a:spcAft>
+                <a:spcPts val="600"/>
+              </a:spcAft>
+            </a:pPr>
+            <a:r>
+              <a:rPr sz="1500">
+                <a:solidFill>
+                  <a:srgbClr val="22282E"/>
+                </a:solidFill>
+              </a:rPr>
+              <a:t>•  Aplica una prueba estadística para detectar tu propio stego object.</a:t>
+            </a:r>
+          </a:p>
+          <a:p>
+            <a:pPr>
+              <a:spcAft>
+                <a:spcPts val="600"/>
+              </a:spcAft>
+            </a:pPr>
+            <a:r>
+              <a:rPr sz="1500">
+                <a:solidFill>
+                  <a:srgbClr val="22282E"/>
+                </a:solidFill>
+              </a:rPr>
+              <a:t>•  Cifra un mensaje y ocúltalo; razona qué protege cada capa.</a:t>
+            </a:r>
+          </a:p>
+          <a:p>
+            <a:pPr>
+              <a:spcAft>
+                <a:spcPts val="600"/>
+              </a:spcAft>
+            </a:pPr>
+            <a:r>
+              <a:rPr sz="1500">
+                <a:solidFill>
+                  <a:srgbClr val="22282E"/>
+                </a:solidFill>
+              </a:rPr>
+              <a:t>•  Investiga un caso real de malware que usó esteganografía.</a:t>
+            </a:r>
+          </a:p>
+          <a:p>
+            <a:pPr>
+              <a:spcAft>
+                <a:spcPts val="600"/>
+              </a:spcAft>
+            </a:pPr>
+            <a:r>
+              <a:rPr sz="1500">
+                <a:solidFill>
+                  <a:srgbClr val="22282E"/>
+                </a:solidFill>
+              </a:rPr>
+              <a:t>•  Compara capacidad e imperceptibilidad de LSB en PNG vs JPEG.</a:t>
             </a:r>
           </a:p>
         </p:txBody>
@@ -3347,7 +3365,7 @@
                   <a:srgbClr val="0B3D2E"/>
                 </a:solidFill>
               </a:rPr>
-              <a:t>❓ Preguntas frecuentes</a:t>
+              <a:t>📝 Reto verificable</a:t>
             </a:r>
           </a:p>
         </p:txBody>
@@ -3385,82 +3403,7 @@
                   <a:srgbClr val="22282E"/>
                 </a:solidFill>
               </a:rPr>
-              <a:t>•  ❓ ¿La esteganografía sustituye al cifrado?</a:t>
-            </a:r>
-          </a:p>
-          <a:p>
-            <a:pPr>
-              <a:spcAft>
-                <a:spcPts val="600"/>
-              </a:spcAft>
-            </a:pPr>
-            <a:r>
-              <a:rPr sz="1500">
-                <a:solidFill>
-                  <a:srgbClr val="22282E"/>
-                </a:solidFill>
-              </a:rPr>
-              <a:t>•  No; oculta la existencia, no el contenido. Combínala con cifrado para defensa en profundidad.</a:t>
-            </a:r>
-          </a:p>
-          <a:p>
-            <a:pPr>
-              <a:spcAft>
-                <a:spcPts val="600"/>
-              </a:spcAft>
-            </a:pPr>
-            <a:r>
-              <a:rPr sz="1500">
-                <a:solidFill>
-                  <a:srgbClr val="22282E"/>
-                </a:solidFill>
-              </a:rPr>
-              <a:t>•  ❓ ¿Es fácil detectar LSB?</a:t>
-            </a:r>
-          </a:p>
-          <a:p>
-            <a:pPr>
-              <a:spcAft>
-                <a:spcPts val="600"/>
-              </a:spcAft>
-            </a:pPr>
-            <a:r>
-              <a:rPr sz="1500">
-                <a:solidFill>
-                  <a:srgbClr val="22282E"/>
-                </a:solidFill>
-              </a:rPr>
-              <a:t>•  Sí, con análisis estadístico. La esteganografía robusta es un campo activo; LSB simple es didáctico pero detectable.</a:t>
-            </a:r>
-          </a:p>
-          <a:p>
-            <a:pPr>
-              <a:spcAft>
-                <a:spcPts val="600"/>
-              </a:spcAft>
-            </a:pPr>
-            <a:r>
-              <a:rPr sz="1500">
-                <a:solidFill>
-                  <a:srgbClr val="22282E"/>
-                </a:solidFill>
-              </a:rPr>
-              <a:t>•  ❓ ¿Para qué sirve legítimamente?</a:t>
-            </a:r>
-          </a:p>
-          <a:p>
-            <a:pPr>
-              <a:spcAft>
-                <a:spcPts val="600"/>
-              </a:spcAft>
-            </a:pPr>
-            <a:r>
-              <a:rPr sz="1500">
-                <a:solidFill>
-                  <a:srgbClr val="22282E"/>
-                </a:solidFill>
-              </a:rPr>
-              <a:t>•  Marcas de agua, trazabilidad de filtraciones, autenticación de contenido y ocultación de metadatos sensibles.</a:t>
+              <a:t>•  Implementa una herramienta que cifre un mensaje con AES-GCM y lo oculte por LSB en una imagen, más un extractor que recupere y descifre el mensaje. Criterio de aceptación: el mensaje se recupera…</a:t>
             </a:r>
           </a:p>
         </p:txBody>
@@ -3511,7 +3454,7 @@
                   <a:srgbClr val="0B3D2E"/>
                 </a:solidFill>
               </a:rPr>
-              <a:t>🔗 Referencias</a:t>
+              <a:t>⚠️ Errores comunes</a:t>
             </a:r>
           </a:p>
         </p:txBody>
@@ -3549,6 +3492,319 @@
                   <a:srgbClr val="22282E"/>
                 </a:solidFill>
               </a:rPr>
+              <a:t>•  El mensaje oculto se pierde — Recompresión JPEG destruye LSB; usa formatos sin pérdida (PNG)</a:t>
+            </a:r>
+          </a:p>
+          <a:p>
+            <a:pPr>
+              <a:spcAft>
+                <a:spcPts val="600"/>
+              </a:spcAft>
+            </a:pPr>
+            <a:r>
+              <a:rPr sz="1500">
+                <a:solidFill>
+                  <a:srgbClr val="22282E"/>
+                </a:solidFill>
+              </a:rPr>
+              <a:t>•  Confiar solo en la ocultación — Si se detecta, se lee; cifra antes de ocultar</a:t>
+            </a:r>
+          </a:p>
+          <a:p>
+            <a:pPr>
+              <a:spcAft>
+                <a:spcPts val="600"/>
+              </a:spcAft>
+            </a:pPr>
+            <a:r>
+              <a:rPr sz="1500">
+                <a:solidFill>
+                  <a:srgbClr val="22282E"/>
+                </a:solidFill>
+              </a:rPr>
+              <a:t>•  Portador visiblemente alterado — Demasiada carga; reduce la capacidad</a:t>
+            </a:r>
+          </a:p>
+          <a:p>
+            <a:pPr>
+              <a:spcAft>
+                <a:spcPts val="600"/>
+              </a:spcAft>
+            </a:pPr>
+            <a:r>
+              <a:rPr sz="1500">
+                <a:solidFill>
+                  <a:srgbClr val="22282E"/>
+                </a:solidFill>
+              </a:rPr>
+              <a:t>•  Estego detectable trivialmente — Patrón LSB uniforme; distribuye o usa técnicas robustas</a:t>
+            </a:r>
+          </a:p>
+          <a:p>
+            <a:pPr>
+              <a:spcAft>
+                <a:spcPts val="600"/>
+              </a:spcAft>
+            </a:pPr>
+            <a:r>
+              <a:rPr sz="1500">
+                <a:solidFill>
+                  <a:srgbClr val="22282E"/>
+                </a:solidFill>
+              </a:rPr>
+              <a:t>•  Usar estego para evadir controles sin permiso — Ilegal; limítate a laboratorio propio</a:t>
+            </a:r>
+          </a:p>
+        </p:txBody>
+      </p:sp>
+    </p:spTree>
+  </p:cSld>
+  <p:clrMapOvr>
+    <a:masterClrMapping/>
+  </p:clrMapOvr>
+</p:sld>
+</file>
+
+<file path=ppt/slides/slide13.xml><?xml version="1.0" encoding="utf-8"?>
+<p:sld xmlns:a="http://schemas.openxmlformats.org/drawingml/2006/main" xmlns:p="http://schemas.openxmlformats.org/presentationml/2006/main" xmlns:r="http://schemas.openxmlformats.org/officeDocument/2006/relationships">
+  <p:cSld>
+    <p:spTree>
+      <p:nvGrpSpPr>
+        <p:cNvPr id="1" name=""/>
+        <p:cNvGrpSpPr/>
+        <p:nvPr/>
+      </p:nvGrpSpPr>
+      <p:grpSpPr/>
+      <p:sp>
+        <p:nvSpPr>
+          <p:cNvPr id="2" name="TextBox 1"/>
+          <p:cNvSpPr txBox="1"/>
+          <p:nvPr/>
+        </p:nvSpPr>
+        <p:spPr>
+          <a:xfrm>
+            <a:off x="457200" y="320040"/>
+            <a:ext cx="8229600" cy="822960"/>
+          </a:xfrm>
+          <a:prstGeom prst="rect">
+            <a:avLst/>
+          </a:prstGeom>
+          <a:noFill/>
+        </p:spPr>
+        <p:txBody>
+          <a:bodyPr wrap="square">
+            <a:spAutoFit/>
+          </a:bodyPr>
+          <a:lstStyle/>
+          <a:p>
+            <a:r>
+              <a:rPr sz="2600" b="1">
+                <a:solidFill>
+                  <a:srgbClr val="0B3D2E"/>
+                </a:solidFill>
+              </a:rPr>
+              <a:t>❓ Preguntas frecuentes</a:t>
+            </a:r>
+          </a:p>
+        </p:txBody>
+      </p:sp>
+      <p:sp>
+        <p:nvSpPr>
+          <p:cNvPr id="3" name="TextBox 2"/>
+          <p:cNvSpPr txBox="1"/>
+          <p:nvPr/>
+        </p:nvSpPr>
+        <p:spPr>
+          <a:xfrm>
+            <a:off x="457200" y="1280160"/>
+            <a:ext cx="8229600" cy="4937760"/>
+          </a:xfrm>
+          <a:prstGeom prst="rect">
+            <a:avLst/>
+          </a:prstGeom>
+          <a:noFill/>
+        </p:spPr>
+        <p:txBody>
+          <a:bodyPr wrap="square">
+            <a:spAutoFit/>
+          </a:bodyPr>
+          <a:lstStyle/>
+          <a:p>
+            <a:pPr>
+              <a:spcAft>
+                <a:spcPts val="600"/>
+              </a:spcAft>
+            </a:pPr>
+            <a:r>
+              <a:rPr sz="1500">
+                <a:solidFill>
+                  <a:srgbClr val="22282E"/>
+                </a:solidFill>
+              </a:rPr>
+              <a:t>•  ❓ ¿La esteganografía sustituye al cifrado?</a:t>
+            </a:r>
+          </a:p>
+          <a:p>
+            <a:pPr>
+              <a:spcAft>
+                <a:spcPts val="600"/>
+              </a:spcAft>
+            </a:pPr>
+            <a:r>
+              <a:rPr sz="1500">
+                <a:solidFill>
+                  <a:srgbClr val="22282E"/>
+                </a:solidFill>
+              </a:rPr>
+              <a:t>•  No; oculta la existencia, no el contenido. Combínala con cifrado para defensa en profundidad.</a:t>
+            </a:r>
+          </a:p>
+          <a:p>
+            <a:pPr>
+              <a:spcAft>
+                <a:spcPts val="600"/>
+              </a:spcAft>
+            </a:pPr>
+            <a:r>
+              <a:rPr sz="1500">
+                <a:solidFill>
+                  <a:srgbClr val="22282E"/>
+                </a:solidFill>
+              </a:rPr>
+              <a:t>•  ❓ ¿Es fácil detectar LSB?</a:t>
+            </a:r>
+          </a:p>
+          <a:p>
+            <a:pPr>
+              <a:spcAft>
+                <a:spcPts val="600"/>
+              </a:spcAft>
+            </a:pPr>
+            <a:r>
+              <a:rPr sz="1500">
+                <a:solidFill>
+                  <a:srgbClr val="22282E"/>
+                </a:solidFill>
+              </a:rPr>
+              <a:t>•  Sí, con análisis estadístico. La esteganografía robusta es un campo activo; LSB simple es didáctico pero detectable.</a:t>
+            </a:r>
+          </a:p>
+          <a:p>
+            <a:pPr>
+              <a:spcAft>
+                <a:spcPts val="600"/>
+              </a:spcAft>
+            </a:pPr>
+            <a:r>
+              <a:rPr sz="1500">
+                <a:solidFill>
+                  <a:srgbClr val="22282E"/>
+                </a:solidFill>
+              </a:rPr>
+              <a:t>•  ❓ ¿Para qué sirve legítimamente?</a:t>
+            </a:r>
+          </a:p>
+          <a:p>
+            <a:pPr>
+              <a:spcAft>
+                <a:spcPts val="600"/>
+              </a:spcAft>
+            </a:pPr>
+            <a:r>
+              <a:rPr sz="1500">
+                <a:solidFill>
+                  <a:srgbClr val="22282E"/>
+                </a:solidFill>
+              </a:rPr>
+              <a:t>•  Marcas de agua, trazabilidad de filtraciones, autenticación de contenido y ocultación de metadatos sensibles.</a:t>
+            </a:r>
+          </a:p>
+        </p:txBody>
+      </p:sp>
+    </p:spTree>
+  </p:cSld>
+  <p:clrMapOvr>
+    <a:masterClrMapping/>
+  </p:clrMapOvr>
+</p:sld>
+</file>
+
+<file path=ppt/slides/slide14.xml><?xml version="1.0" encoding="utf-8"?>
+<p:sld xmlns:a="http://schemas.openxmlformats.org/drawingml/2006/main" xmlns:p="http://schemas.openxmlformats.org/presentationml/2006/main" xmlns:r="http://schemas.openxmlformats.org/officeDocument/2006/relationships">
+  <p:cSld>
+    <p:spTree>
+      <p:nvGrpSpPr>
+        <p:cNvPr id="1" name=""/>
+        <p:cNvGrpSpPr/>
+        <p:nvPr/>
+      </p:nvGrpSpPr>
+      <p:grpSpPr/>
+      <p:sp>
+        <p:nvSpPr>
+          <p:cNvPr id="2" name="TextBox 1"/>
+          <p:cNvSpPr txBox="1"/>
+          <p:nvPr/>
+        </p:nvSpPr>
+        <p:spPr>
+          <a:xfrm>
+            <a:off x="457200" y="320040"/>
+            <a:ext cx="8229600" cy="822960"/>
+          </a:xfrm>
+          <a:prstGeom prst="rect">
+            <a:avLst/>
+          </a:prstGeom>
+          <a:noFill/>
+        </p:spPr>
+        <p:txBody>
+          <a:bodyPr wrap="square">
+            <a:spAutoFit/>
+          </a:bodyPr>
+          <a:lstStyle/>
+          <a:p>
+            <a:r>
+              <a:rPr sz="2600" b="1">
+                <a:solidFill>
+                  <a:srgbClr val="0B3D2E"/>
+                </a:solidFill>
+              </a:rPr>
+              <a:t>🔗 Referencias</a:t>
+            </a:r>
+          </a:p>
+        </p:txBody>
+      </p:sp>
+      <p:sp>
+        <p:nvSpPr>
+          <p:cNvPr id="3" name="TextBox 2"/>
+          <p:cNvSpPr txBox="1"/>
+          <p:nvPr/>
+        </p:nvSpPr>
+        <p:spPr>
+          <a:xfrm>
+            <a:off x="457200" y="1280160"/>
+            <a:ext cx="8229600" cy="4937760"/>
+          </a:xfrm>
+          <a:prstGeom prst="rect">
+            <a:avLst/>
+          </a:prstGeom>
+          <a:noFill/>
+        </p:spPr>
+        <p:txBody>
+          <a:bodyPr wrap="square">
+            <a:spAutoFit/>
+          </a:bodyPr>
+          <a:lstStyle/>
+          <a:p>
+            <a:pPr>
+              <a:spcAft>
+                <a:spcPts val="600"/>
+              </a:spcAft>
+            </a:pPr>
+            <a:r>
+              <a:rPr sz="1500">
+                <a:solidFill>
+                  <a:srgbClr val="22282E"/>
+                </a:solidFill>
+              </a:rPr>
               <a:t>•  Aumasson, Serious Cryptography (contexto de ocultación y aleatoriedad).</a:t>
             </a:r>
           </a:p>
@@ -3599,6 +3855,81 @@
           </a:p>
         </p:txBody>
       </p:sp>
+    </p:spTree>
+  </p:cSld>
+  <p:clrMapOvr>
+    <a:masterClrMapping/>
+  </p:clrMapOvr>
+</p:sld>
+</file>
+
+<file path=ppt/slides/slide15.xml><?xml version="1.0" encoding="utf-8"?>
+<p:sld xmlns:a="http://schemas.openxmlformats.org/drawingml/2006/main" xmlns:p="http://schemas.openxmlformats.org/presentationml/2006/main" xmlns:r="http://schemas.openxmlformats.org/officeDocument/2006/relationships">
+  <p:cSld>
+    <p:spTree>
+      <p:nvGrpSpPr>
+        <p:cNvPr id="1" name=""/>
+        <p:cNvGrpSpPr/>
+        <p:nvPr/>
+      </p:nvGrpSpPr>
+      <p:grpSpPr/>
+      <p:sp>
+        <p:nvSpPr>
+          <p:cNvPr id="2" name="TextBox 1"/>
+          <p:cNvSpPr txBox="1"/>
+          <p:nvPr/>
+        </p:nvSpPr>
+        <p:spPr>
+          <a:xfrm>
+            <a:off x="457200" y="274320"/>
+            <a:ext cx="8229600" cy="640080"/>
+          </a:xfrm>
+          <a:prstGeom prst="rect">
+            <a:avLst/>
+          </a:prstGeom>
+          <a:noFill/>
+        </p:spPr>
+        <p:txBody>
+          <a:bodyPr wrap="square">
+            <a:spAutoFit/>
+          </a:bodyPr>
+          <a:lstStyle/>
+          <a:p>
+            <a:r>
+              <a:rPr sz="2200" b="1">
+                <a:solidFill>
+                  <a:srgbClr val="0B3D2E"/>
+                </a:solidFill>
+              </a:rPr>
+              <a:t>Diagrama de la clase</a:t>
+            </a:r>
+          </a:p>
+        </p:txBody>
+      </p:sp>
+      <p:pic>
+        <p:nvPicPr>
+          <p:cNvPr id="3" name="Picture 2" descr="469d38686229a8e3.png"/>
+          <p:cNvPicPr>
+            <a:picLocks noChangeAspect="1"/>
+          </p:cNvPicPr>
+          <p:nvPr/>
+        </p:nvPicPr>
+        <p:blipFill>
+          <a:blip r:embed="rId2"/>
+          <a:stretch>
+            <a:fillRect/>
+          </a:stretch>
+        </p:blipFill>
+        <p:spPr>
+          <a:xfrm>
+            <a:off x="457200" y="3159252"/>
+            <a:ext cx="8229600" cy="1179576"/>
+          </a:xfrm>
+          <a:prstGeom prst="rect">
+            <a:avLst/>
+          </a:prstGeom>
+        </p:spPr>
+      </p:pic>
     </p:spTree>
   </p:cSld>
   <p:clrMapOvr>
@@ -3683,7 +4014,7 @@
                   <a:srgbClr val="22282E"/>
                 </a:solidFill>
               </a:rPr>
-              <a:t>•  Distinguir esteganografía (ocultar la existencia de un mensaje) de criptografía (ocultar su contenido), y entender cómo se combinan. El alumno aprenderá técnicas clásicas (LSB en imágenes, ocultación en metadatos), el estegoanálisis (detección), y usos legítimos (marcas de agua, watermarking) frente a usos maliciosos (exfiltración, C2 encubierto). Todo se practica sobre archivos propios de laboratorio.</a:t>
+              <a:t>•  Distinguir esteganografía (ocultar la existencia de un mensaje) de criptografía (ocultar su contenido), y entender cómo se combinan. El alumno aprenderá técnicas clásicas (LSB en imágenes, ocultación…</a:t>
             </a:r>
           </a:p>
         </p:txBody>
@@ -4077,7 +4408,7 @@
                   <a:srgbClr val="0B3D2E"/>
                 </a:solidFill>
               </a:rPr>
-              <a:t>📖 Definiciones y características</a:t>
+              <a:t>🧠 Explicación en profundidad</a:t>
             </a:r>
           </a:p>
         </p:txBody>
@@ -4115,97 +4446,97 @@
                   <a:srgbClr val="22282E"/>
                 </a:solidFill>
               </a:rPr>
-              <a:t>•  Esteganografía: ocultar información dentro de otro medio (imagen, audio, texto) para que su existencia pase inadvertida. Característica: la seguridad depende de que nadie sospeche.</a:t>
-            </a:r>
-          </a:p>
-          <a:p>
-            <a:pPr>
-              <a:spcAft>
-                <a:spcPts val="600"/>
-              </a:spcAft>
-            </a:pPr>
-            <a:r>
-              <a:rPr sz="1500">
-                <a:solidFill>
-                  <a:srgbClr val="22282E"/>
-                </a:solidFill>
-              </a:rPr>
-              <a:t>•  LSB (Least Significant Bit): sustituir el bit menos significativo de cada píxel/byte por bits del mensaje; imperceptible a la vista pero detectable estadísticamente.</a:t>
-            </a:r>
-          </a:p>
-          <a:p>
-            <a:pPr>
-              <a:spcAft>
-                <a:spcPts val="600"/>
-              </a:spcAft>
-            </a:pPr>
-            <a:r>
-              <a:rPr sz="1500">
-                <a:solidFill>
-                  <a:srgbClr val="22282E"/>
-                </a:solidFill>
-              </a:rPr>
-              <a:t>•  Estegoanálisis: conjunto de técnicas para detectar la presencia de datos ocultos (análisis estadístico, chi-cuadrado, herramientas como stegdetect).</a:t>
-            </a:r>
-          </a:p>
-          <a:p>
-            <a:pPr>
-              <a:spcAft>
-                <a:spcPts val="600"/>
-              </a:spcAft>
-            </a:pPr>
-            <a:r>
-              <a:rPr sz="1500">
-                <a:solidFill>
-                  <a:srgbClr val="22282E"/>
-                </a:solidFill>
-              </a:rPr>
-              <a:t>•  Cover / stego object: el medio portador original y el resultante con datos ocultos.</a:t>
-            </a:r>
-          </a:p>
-          <a:p>
-            <a:pPr>
-              <a:spcAft>
-                <a:spcPts val="600"/>
-              </a:spcAft>
-            </a:pPr>
-            <a:r>
-              <a:rPr sz="1500">
-                <a:solidFill>
-                  <a:srgbClr val="22282E"/>
-                </a:solidFill>
-              </a:rPr>
-              <a:t>•  Watermarking: marca embebida (visible o no) para autenticar propiedad o rastrear filtraciones; prioriza robustez sobre capacidad.</a:t>
-            </a:r>
-          </a:p>
-          <a:p>
-            <a:pPr>
-              <a:spcAft>
-                <a:spcPts val="600"/>
-              </a:spcAft>
-            </a:pPr>
-            <a:r>
-              <a:rPr sz="1500">
-                <a:solidFill>
-                  <a:srgbClr val="22282E"/>
-                </a:solidFill>
-              </a:rPr>
-              <a:t>•  Capacidad vs imperceptibilidad vs robustez: trade-off fundamental de toda técnica de ocultación.</a:t>
-            </a:r>
-          </a:p>
-          <a:p>
-            <a:pPr>
-              <a:spcAft>
-                <a:spcPts val="600"/>
-              </a:spcAft>
-            </a:pPr>
-            <a:r>
-              <a:rPr sz="1500">
-                <a:solidFill>
-                  <a:srgbClr val="22282E"/>
-                </a:solidFill>
-              </a:rPr>
-              <a:t>•  Cifrar-luego-ocultar: cifrar el mensaje antes de esconderlo protege el contenido aunque se detecte el portador.</a:t>
+              <a:t>•  La criptografía y la esteganografía resuelven problemas distintos, y confundirlos lleva a</a:t>
+            </a:r>
+          </a:p>
+          <a:p>
+            <a:pPr>
+              <a:spcAft>
+                <a:spcPts val="600"/>
+              </a:spcAft>
+            </a:pPr>
+            <a:r>
+              <a:rPr sz="1500">
+                <a:solidFill>
+                  <a:srgbClr val="22282E"/>
+                </a:solidFill>
+              </a:rPr>
+              <a:t>•  decisiones malas. La criptografía hace que un mensaje sea ilegible, pero no oculta que</a:t>
+            </a:r>
+          </a:p>
+          <a:p>
+            <a:pPr>
+              <a:spcAft>
+                <a:spcPts val="600"/>
+              </a:spcAft>
+            </a:pPr>
+            <a:r>
+              <a:rPr sz="1500">
+                <a:solidFill>
+                  <a:srgbClr val="22282E"/>
+                </a:solidFill>
+              </a:rPr>
+              <a:t>•  existe: quien observe el canal ve un bloque de datos cifrado y sabe que hubo una</a:t>
+            </a:r>
+          </a:p>
+          <a:p>
+            <a:pPr>
+              <a:spcAft>
+                <a:spcPts val="600"/>
+              </a:spcAft>
+            </a:pPr>
+            <a:r>
+              <a:rPr sz="1500">
+                <a:solidFill>
+                  <a:srgbClr val="22282E"/>
+                </a:solidFill>
+              </a:rPr>
+              <a:t>•  comunicación protegida. La esteganografía hace que el mensaje sea invisible,</a:t>
+            </a:r>
+          </a:p>
+          <a:p>
+            <a:pPr>
+              <a:spcAft>
+                <a:spcPts val="600"/>
+              </a:spcAft>
+            </a:pPr>
+            <a:r>
+              <a:rPr sz="1500">
+                <a:solidFill>
+                  <a:srgbClr val="22282E"/>
+                </a:solidFill>
+              </a:rPr>
+              <a:t>•  escondiéndolo dentro de un portador de apariencia inocente, pero no lo protege si alguien</a:t>
+            </a:r>
+          </a:p>
+          <a:p>
+            <a:pPr>
+              <a:spcAft>
+                <a:spcPts val="600"/>
+              </a:spcAft>
+            </a:pPr>
+            <a:r>
+              <a:rPr sz="1500">
+                <a:solidFill>
+                  <a:srgbClr val="22282E"/>
+                </a:solidFill>
+              </a:rPr>
+              <a:t>•  descubre dónde está.</a:t>
+            </a:r>
+          </a:p>
+          <a:p>
+            <a:pPr>
+              <a:spcAft>
+                <a:spcPts val="600"/>
+              </a:spcAft>
+            </a:pPr>
+            <a:r>
+              <a:rPr sz="1500">
+                <a:solidFill>
+                  <a:srgbClr val="22282E"/>
+                </a:solidFill>
+              </a:rPr>
+              <a:t>•  De ahí que su valor real aparezca cuando el propio hecho de cifrar es peligroso o</a:t>
             </a:r>
           </a:p>
         </p:txBody>
@@ -4256,7 +4587,7 @@
                   <a:srgbClr val="0B3D2E"/>
                 </a:solidFill>
               </a:rPr>
-              <a:t>🧰 Herramientas y preparación</a:t>
+              <a:t>📖 Definiciones y características</a:t>
             </a:r>
           </a:p>
         </p:txBody>
@@ -4294,37 +4625,97 @@
                   <a:srgbClr val="22282E"/>
                 </a:solidFill>
               </a:rPr>
-              <a:t>•  pip install pillow numpy</a:t>
-            </a:r>
-          </a:p>
-          <a:p>
-            <a:pPr>
-              <a:spcAft>
-                <a:spcPts val="600"/>
-              </a:spcAft>
-            </a:pPr>
-            <a:r>
-              <a:rPr sz="1500">
-                <a:solidFill>
-                  <a:srgbClr val="22282E"/>
-                </a:solidFill>
-              </a:rPr>
-              <a:t>•  which steghide zsteg stegseek 2&gt;/dev/null || echo "opcional para el lab"</a:t>
-            </a:r>
-          </a:p>
-          <a:p>
-            <a:pPr>
-              <a:spcAft>
-                <a:spcPts val="600"/>
-              </a:spcAft>
-            </a:pPr>
-            <a:r>
-              <a:rPr sz="1500">
-                <a:solidFill>
-                  <a:srgbClr val="22282E"/>
-                </a:solidFill>
-              </a:rPr>
-              <a:t>•  Usa imágenes y archivos generados por ti. No manipules material ajeno.</a:t>
+              <a:t>•  Esteganografía: ocultar información dentro de otro medio (imagen, audio, texto) para que su existencia pase inadvertida. Característica: la seguridad depende de que nadie sospeche.</a:t>
+            </a:r>
+          </a:p>
+          <a:p>
+            <a:pPr>
+              <a:spcAft>
+                <a:spcPts val="600"/>
+              </a:spcAft>
+            </a:pPr>
+            <a:r>
+              <a:rPr sz="1500">
+                <a:solidFill>
+                  <a:srgbClr val="22282E"/>
+                </a:solidFill>
+              </a:rPr>
+              <a:t>•  LSB (Least Significant Bit): sustituir el bit menos significativo de cada píxel/byte por bits del mensaje; imperceptible a la vista pero detectable estadísticamente.</a:t>
+            </a:r>
+          </a:p>
+          <a:p>
+            <a:pPr>
+              <a:spcAft>
+                <a:spcPts val="600"/>
+              </a:spcAft>
+            </a:pPr>
+            <a:r>
+              <a:rPr sz="1500">
+                <a:solidFill>
+                  <a:srgbClr val="22282E"/>
+                </a:solidFill>
+              </a:rPr>
+              <a:t>•  Estegoanálisis: conjunto de técnicas para detectar la presencia de datos ocultos (análisis estadístico, chi-cuadrado, herramientas como stegdetect).</a:t>
+            </a:r>
+          </a:p>
+          <a:p>
+            <a:pPr>
+              <a:spcAft>
+                <a:spcPts val="600"/>
+              </a:spcAft>
+            </a:pPr>
+            <a:r>
+              <a:rPr sz="1500">
+                <a:solidFill>
+                  <a:srgbClr val="22282E"/>
+                </a:solidFill>
+              </a:rPr>
+              <a:t>•  Cover / stego object: el medio portador original y el resultante con datos ocultos.</a:t>
+            </a:r>
+          </a:p>
+          <a:p>
+            <a:pPr>
+              <a:spcAft>
+                <a:spcPts val="600"/>
+              </a:spcAft>
+            </a:pPr>
+            <a:r>
+              <a:rPr sz="1500">
+                <a:solidFill>
+                  <a:srgbClr val="22282E"/>
+                </a:solidFill>
+              </a:rPr>
+              <a:t>•  Watermarking: marca embebida (visible o no) para autenticar propiedad o rastrear filtraciones; prioriza robustez sobre capacidad.</a:t>
+            </a:r>
+          </a:p>
+          <a:p>
+            <a:pPr>
+              <a:spcAft>
+                <a:spcPts val="600"/>
+              </a:spcAft>
+            </a:pPr>
+            <a:r>
+              <a:rPr sz="1500">
+                <a:solidFill>
+                  <a:srgbClr val="22282E"/>
+                </a:solidFill>
+              </a:rPr>
+              <a:t>•  Capacidad vs imperceptibilidad vs robustez: trade-off fundamental de toda técnica de ocultación.</a:t>
+            </a:r>
+          </a:p>
+          <a:p>
+            <a:pPr>
+              <a:spcAft>
+                <a:spcPts val="600"/>
+              </a:spcAft>
+            </a:pPr>
+            <a:r>
+              <a:rPr sz="1500">
+                <a:solidFill>
+                  <a:srgbClr val="22282E"/>
+                </a:solidFill>
+              </a:rPr>
+              <a:t>•  Cifrar-luego-ocultar: cifrar el mensaje antes de esconderlo protege el contenido aunque se detecte el portador.</a:t>
             </a:r>
           </a:p>
         </p:txBody>
@@ -4375,7 +4766,7 @@
                   <a:srgbClr val="0B3D2E"/>
                 </a:solidFill>
               </a:rPr>
-              <a:t>🧪 Laboratorio guiado</a:t>
+              <a:t>📔 Glosario</a:t>
             </a:r>
           </a:p>
         </p:txBody>
@@ -4413,97 +4804,97 @@
                   <a:srgbClr val="22282E"/>
                 </a:solidFill>
               </a:rPr>
-              <a:t>•  Oculta un mensaje con LSB en Python:</a:t>
-            </a:r>
-          </a:p>
-          <a:p>
-            <a:pPr>
-              <a:spcAft>
-                <a:spcPts val="600"/>
-              </a:spcAft>
-            </a:pPr>
-            <a:r>
-              <a:rPr sz="1500">
-                <a:solidFill>
-                  <a:srgbClr val="22282E"/>
-                </a:solidFill>
-              </a:rPr>
-              <a:t>•  from PIL import Image</a:t>
-            </a:r>
-          </a:p>
-          <a:p>
-            <a:pPr>
-              <a:spcAft>
-                <a:spcPts val="600"/>
-              </a:spcAft>
-            </a:pPr>
-            <a:r>
-              <a:rPr sz="1500">
-                <a:solidFill>
-                  <a:srgbClr val="22282E"/>
-                </a:solidFill>
-              </a:rPr>
-              <a:t>•  img = Image.open("cover.png").convert("RGB")</a:t>
-            </a:r>
-          </a:p>
-          <a:p>
-            <a:pPr>
-              <a:spcAft>
-                <a:spcPts val="600"/>
-              </a:spcAft>
-            </a:pPr>
-            <a:r>
-              <a:rPr sz="1500">
-                <a:solidFill>
-                  <a:srgbClr val="22282E"/>
-                </a:solidFill>
-              </a:rPr>
-              <a:t>•  px = img.load()</a:t>
-            </a:r>
-          </a:p>
-          <a:p>
-            <a:pPr>
-              <a:spcAft>
-                <a:spcPts val="600"/>
-              </a:spcAft>
-            </a:pPr>
-            <a:r>
-              <a:rPr sz="1500">
-                <a:solidFill>
-                  <a:srgbClr val="22282E"/>
-                </a:solidFill>
-              </a:rPr>
-              <a:t>•  msg = "secreto".encode() + b"\x00"</a:t>
-            </a:r>
-          </a:p>
-          <a:p>
-            <a:pPr>
-              <a:spcAft>
-                <a:spcPts val="600"/>
-              </a:spcAft>
-            </a:pPr>
-            <a:r>
-              <a:rPr sz="1500">
-                <a:solidFill>
-                  <a:srgbClr val="22282E"/>
-                </a:solidFill>
-              </a:rPr>
-              <a:t>•  bits = ''.join(f"{b:08b}" for b in msg)</a:t>
-            </a:r>
-          </a:p>
-          <a:p>
-            <a:pPr>
-              <a:spcAft>
-                <a:spcPts val="600"/>
-              </a:spcAft>
-            </a:pPr>
-            <a:r>
-              <a:rPr sz="1500">
-                <a:solidFill>
-                  <a:srgbClr val="22282E"/>
-                </a:solidFill>
-              </a:rPr>
-              <a:t>•  i = 0</a:t>
+              <a:t>•  Término — Definición concisa</a:t>
+            </a:r>
+          </a:p>
+          <a:p>
+            <a:pPr>
+              <a:spcAft>
+                <a:spcPts val="600"/>
+              </a:spcAft>
+            </a:pPr>
+            <a:r>
+              <a:rPr sz="1500">
+                <a:solidFill>
+                  <a:srgbClr val="22282E"/>
+                </a:solidFill>
+              </a:rPr>
+              <a:t>•  Esteganografía — Ocultar la existencia del mensaje</a:t>
+            </a:r>
+          </a:p>
+          <a:p>
+            <a:pPr>
+              <a:spcAft>
+                <a:spcPts val="600"/>
+              </a:spcAft>
+            </a:pPr>
+            <a:r>
+              <a:rPr sz="1500">
+                <a:solidFill>
+                  <a:srgbClr val="22282E"/>
+                </a:solidFill>
+              </a:rPr>
+              <a:t>•  Criptografía — Ocultar el contenido del mensaje</a:t>
+            </a:r>
+          </a:p>
+          <a:p>
+            <a:pPr>
+              <a:spcAft>
+                <a:spcPts val="600"/>
+              </a:spcAft>
+            </a:pPr>
+            <a:r>
+              <a:rPr sz="1500">
+                <a:solidFill>
+                  <a:srgbClr val="22282E"/>
+                </a:solidFill>
+              </a:rPr>
+              <a:t>•  Portador (cover) — Fichero o canal de apariencia inocente que aloja el mensaje</a:t>
+            </a:r>
+          </a:p>
+          <a:p>
+            <a:pPr>
+              <a:spcAft>
+                <a:spcPts val="600"/>
+              </a:spcAft>
+            </a:pPr>
+            <a:r>
+              <a:rPr sz="1500">
+                <a:solidFill>
+                  <a:srgbClr val="22282E"/>
+                </a:solidFill>
+              </a:rPr>
+              <a:t>•  Estego-objeto — Portador con la carga ya oculta dentro</a:t>
+            </a:r>
+          </a:p>
+          <a:p>
+            <a:pPr>
+              <a:spcAft>
+                <a:spcPts val="600"/>
+              </a:spcAft>
+            </a:pPr>
+            <a:r>
+              <a:rPr sz="1500">
+                <a:solidFill>
+                  <a:srgbClr val="22282E"/>
+                </a:solidFill>
+              </a:rPr>
+              <a:t>•  LSB — Sustitución del bit menos significativo</a:t>
+            </a:r>
+          </a:p>
+          <a:p>
+            <a:pPr>
+              <a:spcAft>
+                <a:spcPts val="600"/>
+              </a:spcAft>
+            </a:pPr>
+            <a:r>
+              <a:rPr sz="1500">
+                <a:solidFill>
+                  <a:srgbClr val="22282E"/>
+                </a:solidFill>
+              </a:rPr>
+              <a:t>•  Formato sin pérdida — PNG, BMP, WAV; necesarios para que el LSB sobreviva</a:t>
             </a:r>
           </a:p>
         </p:txBody>
@@ -4554,7 +4945,7 @@
                   <a:srgbClr val="0B3D2E"/>
                 </a:solidFill>
               </a:rPr>
-              <a:t>✍️ Ejercicios</a:t>
+              <a:t>🧰 Herramientas y preparación</a:t>
             </a:r>
           </a:p>
         </p:txBody>
@@ -4592,82 +4983,7 @@
                   <a:srgbClr val="22282E"/>
                 </a:solidFill>
               </a:rPr>
-              <a:t>•  Explica la diferencia entre esteganografía y cifrado con un ejemplo.</a:t>
-            </a:r>
-          </a:p>
-          <a:p>
-            <a:pPr>
-              <a:spcAft>
-                <a:spcPts val="600"/>
-              </a:spcAft>
-            </a:pPr>
-            <a:r>
-              <a:rPr sz="1500">
-                <a:solidFill>
-                  <a:srgbClr val="22282E"/>
-                </a:solidFill>
-              </a:rPr>
-              <a:t>•  Oculta y recupera un mensaje LSB en una imagen propia.</a:t>
-            </a:r>
-          </a:p>
-          <a:p>
-            <a:pPr>
-              <a:spcAft>
-                <a:spcPts val="600"/>
-              </a:spcAft>
-            </a:pPr>
-            <a:r>
-              <a:rPr sz="1500">
-                <a:solidFill>
-                  <a:srgbClr val="22282E"/>
-                </a:solidFill>
-              </a:rPr>
-              <a:t>•  Aplica una prueba estadística para detectar tu propio stego object.</a:t>
-            </a:r>
-          </a:p>
-          <a:p>
-            <a:pPr>
-              <a:spcAft>
-                <a:spcPts val="600"/>
-              </a:spcAft>
-            </a:pPr>
-            <a:r>
-              <a:rPr sz="1500">
-                <a:solidFill>
-                  <a:srgbClr val="22282E"/>
-                </a:solidFill>
-              </a:rPr>
-              <a:t>•  Cifra un mensaje y ocúltalo; razona qué protege cada capa.</a:t>
-            </a:r>
-          </a:p>
-          <a:p>
-            <a:pPr>
-              <a:spcAft>
-                <a:spcPts val="600"/>
-              </a:spcAft>
-            </a:pPr>
-            <a:r>
-              <a:rPr sz="1500">
-                <a:solidFill>
-                  <a:srgbClr val="22282E"/>
-                </a:solidFill>
-              </a:rPr>
-              <a:t>•  Investiga un caso real de malware que usó esteganografía.</a:t>
-            </a:r>
-          </a:p>
-          <a:p>
-            <a:pPr>
-              <a:spcAft>
-                <a:spcPts val="600"/>
-              </a:spcAft>
-            </a:pPr>
-            <a:r>
-              <a:rPr sz="1500">
-                <a:solidFill>
-                  <a:srgbClr val="22282E"/>
-                </a:solidFill>
-              </a:rPr>
-              <a:t>•  Compara capacidad e imperceptibilidad de LSB en PNG vs JPEG.</a:t>
+              <a:t>•  Usa imágenes y archivos generados por ti. No manipules material ajeno.</a:t>
             </a:r>
           </a:p>
         </p:txBody>
@@ -4718,7 +5034,7 @@
                   <a:srgbClr val="0B3D2E"/>
                 </a:solidFill>
               </a:rPr>
-              <a:t>📝 Reto verificable</a:t>
+              <a:t>🧪 Laboratorio guiado</a:t>
             </a:r>
           </a:p>
         </p:txBody>
@@ -4756,7 +5072,67 @@
                   <a:srgbClr val="22282E"/>
                 </a:solidFill>
               </a:rPr>
-              <a:t>•  Implementa una herramienta que cifre un mensaje con AES-GCM y lo oculte por LSB en una imagen, más un extractor que recupere y descifre el mensaje. Criterio de aceptación: el mensaje se recupera intacto solo con la clave correcta, la imagen resultante es visualmente idéntica al portador, y describes qué señal estadística podría delatar la ocultación.</a:t>
+              <a:t>•  Oculta un mensaje con LSB en Python:</a:t>
+            </a:r>
+          </a:p>
+          <a:p>
+            <a:pPr>
+              <a:spcAft>
+                <a:spcPts val="600"/>
+              </a:spcAft>
+            </a:pPr>
+            <a:r>
+              <a:rPr sz="1500">
+                <a:solidFill>
+                  <a:srgbClr val="22282E"/>
+                </a:solidFill>
+              </a:rPr>
+              <a:t>•  Extrae el mensaje leyendo el LSB del canal rojo hasta el terminador \x00.</a:t>
+            </a:r>
+          </a:p>
+          <a:p>
+            <a:pPr>
+              <a:spcAft>
+                <a:spcPts val="600"/>
+              </a:spcAft>
+            </a:pPr>
+            <a:r>
+              <a:rPr sz="1500">
+                <a:solidFill>
+                  <a:srgbClr val="22282E"/>
+                </a:solidFill>
+              </a:rPr>
+              <a:t>•  Cifra antes de ocultar. Cifra el mensaje con AES-GCM (clase 059) y luego escóndelo; ahora, aunque se detecte el portador, el contenido permanece protegido.</a:t>
+            </a:r>
+          </a:p>
+          <a:p>
+            <a:pPr>
+              <a:spcAft>
+                <a:spcPts val="600"/>
+              </a:spcAft>
+            </a:pPr>
+            <a:r>
+              <a:rPr sz="1500">
+                <a:solidFill>
+                  <a:srgbClr val="22282E"/>
+                </a:solidFill>
+              </a:rPr>
+              <a:t>•  Estegoanálisis. Compara histogramas o aplica una prueba chi-cuadrado entre cover.png y stego.png; observa las anomalías que delatan la manipulación LSB. Prueba herramientas como zsteg/stegseek sobre…</a:t>
+            </a:r>
+          </a:p>
+          <a:p>
+            <a:pPr>
+              <a:spcAft>
+                <a:spcPts val="600"/>
+              </a:spcAft>
+            </a:pPr>
+            <a:r>
+              <a:rPr sz="1500">
+                <a:solidFill>
+                  <a:srgbClr val="22282E"/>
+                </a:solidFill>
+              </a:rPr>
+              <a:t>•  Discusión defensiva. Analiza cómo un atacante podría usar imágenes en un foro para C2 encubierto y qué señales buscaría un defensor (tamaños anómalos, entropía, tráfico a imágenes).</a:t>
             </a:r>
           </a:p>
         </p:txBody>
